--- a/fafana_2025-08-02.pptx
+++ b/fafana_2025-08-02.pptx
@@ -18,6 +18,10 @@
     <p:sldId id="266" r:id="rId16"/>
     <p:sldId id="267" r:id="rId17"/>
     <p:sldId id="268" r:id="rId18"/>
+    <p:sldId id="269" r:id="rId19"/>
+    <p:sldId id="270" r:id="rId20"/>
+    <p:sldId id="271" r:id="rId21"/>
+    <p:sldId id="272" r:id="rId22"/>
   </p:sldIdLst>
   <p:sldSz cx="12192000" cy="6858000"/>
   <p:notesSz cx="6858000" cy="9144000"/>
@@ -3914,6 +3918,712 @@
 </p:sld>
 </file>
 
+<file path=ppt/slides/slide14.xml><?xml version="1.0" encoding="utf-8"?>
+<p:sld xmlns:p="http://schemas.openxmlformats.org/presentationml/2006/main" xmlns:a="http://schemas.openxmlformats.org/drawingml/2006/main" xmlns:r="http://schemas.openxmlformats.org/officeDocument/2006/relationships">
+  <p:cSld>
+    <p:spTree>
+      <p:nvGrpSpPr>
+        <p:cNvPr id="1" name=""/>
+        <p:cNvGrpSpPr/>
+        <p:nvPr/>
+      </p:nvGrpSpPr>
+      <p:grpSpPr>
+        <a:xfrm>
+          <a:off x="0" y="0"/>
+          <a:ext cx="0" cy="0"/>
+          <a:chOff x="0" y="0"/>
+          <a:chExt cx="0" cy="0"/>
+        </a:xfrm>
+      </p:grpSpPr>
+      <p:pic>
+        <p:nvPicPr>
+          <p:cNvPr name="Picture 2" id="2"/>
+          <p:cNvPicPr>
+            <a:picLocks noChangeAspect="true"/>
+          </p:cNvPicPr>
+          <p:nvPr/>
+        </p:nvPicPr>
+        <p:blipFill>
+          <a:blip r:embed="rId2"/>
+          <a:stretch>
+            <a:fillRect/>
+          </a:stretch>
+        </p:blipFill>
+        <p:spPr>
+          <a:xfrm>
+            <a:off x="0" y="0"/>
+            <a:ext cx="12192000" cy="6858000"/>
+          </a:xfrm>
+          <a:prstGeom prst="rect">
+            <a:avLst/>
+          </a:prstGeom>
+        </p:spPr>
+      </p:pic>
+      <p:sp>
+        <p:nvSpPr>
+          <p:cNvPr name="TextBox 3" id="3"/>
+          <p:cNvSpPr txBox="true"/>
+          <p:nvPr/>
+        </p:nvSpPr>
+        <p:spPr>
+          <a:xfrm>
+            <a:off x="4953000" y="-190500"/>
+            <a:ext cx="9525000" cy="762000"/>
+          </a:xfrm>
+          <a:prstGeom prst="rect">
+            <a:avLst/>
+          </a:prstGeom>
+        </p:spPr>
+        <p:txBody>
+          <a:bodyPr anchor="t" rtlCol="false"/>
+          <a:lstStyle/>
+          <a:p>
+            <a:pPr algn="l">
+              <a:defRPr/>
+            </a:pPr>
+            <a:r>
+              <a:rPr lang="fr-MG"/>
+              <a:t/>
+            </a:r>
+            <a:endParaRPr lang="en-US" sz="1100"/>
+          </a:p>
+          <a:p>
+            <a:pPr algn="l"/>
+            <a:r>
+              <a:rPr lang="en-US" sz="2900" b="true">
+                <a:solidFill>
+                  <a:srgbClr val="D1AC65"/>
+                </a:solidFill>
+                <a:latin typeface="Verdana"/>
+              </a:rPr>
+              <a:t>FIHIRANA 163 : 1, 3</a:t>
+            </a:r>
+          </a:p>
+        </p:txBody>
+      </p:sp>
+      <p:sp>
+        <p:nvSpPr>
+          <p:cNvPr name="TextBox 4" id="4"/>
+          <p:cNvSpPr txBox="true"/>
+          <p:nvPr/>
+        </p:nvSpPr>
+        <p:spPr>
+          <a:xfrm>
+            <a:off x="685800" y="508000"/>
+            <a:ext cx="10922000" cy="5080000"/>
+          </a:xfrm>
+          <a:prstGeom prst="rect">
+            <a:avLst/>
+          </a:prstGeom>
+        </p:spPr>
+        <p:txBody>
+          <a:bodyPr anchor="t" rtlCol="false"/>
+          <a:lstStyle/>
+          <a:p>
+            <a:pPr algn="l">
+              <a:defRPr/>
+            </a:pPr>
+            <a:r>
+              <a:rPr lang="fr-MG"/>
+              <a:t/>
+            </a:r>
+            <a:endParaRPr lang="en-US" sz="1100"/>
+          </a:p>
+          <a:p>
+            <a:pPr algn="ctr"/>
+            <a:r>
+              <a:rPr lang="en-US" sz="4500" b="true">
+                <a:solidFill>
+                  <a:srgbClr val="D1AC65"/>
+                </a:solidFill>
+                <a:latin typeface="Verdana"/>
+              </a:rPr>
+              <a:t>3- </a:t>
+            </a:r>
+            <a:r>
+              <a:rPr lang="en-US" sz="4500" b="true">
+                <a:solidFill>
+                  <a:srgbClr val="FFFFFF"/>
+                </a:solidFill>
+                <a:latin typeface="Verdana"/>
+              </a:rPr>
+              <a:t>Eto afovoantsika</a:t>
+            </a:r>
+          </a:p>
+          <a:p>
+            <a:pPr algn="ctr"/>
+            <a:r>
+              <a:rPr lang="en-US" sz="4500" b="true">
+                <a:solidFill>
+                  <a:srgbClr val="FFFFFF"/>
+                </a:solidFill>
+                <a:latin typeface="Verdana"/>
+              </a:rPr>
+              <a:t>Ilay Mazava tokana;</a:t>
+            </a:r>
+          </a:p>
+          <a:p>
+            <a:pPr algn="ctr"/>
+            <a:r>
+              <a:rPr lang="en-US" sz="4500" b="true">
+                <a:solidFill>
+                  <a:srgbClr val="FFFFFF"/>
+                </a:solidFill>
+                <a:latin typeface="Verdana"/>
+              </a:rPr>
+              <a:t>Sambatra izay mahita</a:t>
+            </a:r>
+          </a:p>
+          <a:p>
+            <a:pPr algn="ctr"/>
+            <a:r>
+              <a:rPr lang="en-US" sz="4500" b="true">
+                <a:solidFill>
+                  <a:srgbClr val="FFFFFF"/>
+                </a:solidFill>
+                <a:latin typeface="Verdana"/>
+              </a:rPr>
+              <a:t>Azy, fa ho velona.</a:t>
+            </a:r>
+          </a:p>
+        </p:txBody>
+      </p:sp>
+    </p:spTree>
+  </p:cSld>
+  <p:clrMapOvr>
+    <a:masterClrMapping/>
+  </p:clrMapOvr>
+</p:sld>
+</file>
+
+<file path=ppt/slides/slide15.xml><?xml version="1.0" encoding="utf-8"?>
+<p:sld xmlns:p="http://schemas.openxmlformats.org/presentationml/2006/main" xmlns:a="http://schemas.openxmlformats.org/drawingml/2006/main" xmlns:r="http://schemas.openxmlformats.org/officeDocument/2006/relationships">
+  <p:cSld>
+    <p:spTree>
+      <p:nvGrpSpPr>
+        <p:cNvPr id="1" name=""/>
+        <p:cNvGrpSpPr/>
+        <p:nvPr/>
+      </p:nvGrpSpPr>
+      <p:grpSpPr>
+        <a:xfrm>
+          <a:off x="0" y="0"/>
+          <a:ext cx="0" cy="0"/>
+          <a:chOff x="0" y="0"/>
+          <a:chExt cx="0" cy="0"/>
+        </a:xfrm>
+      </p:grpSpPr>
+      <p:pic>
+        <p:nvPicPr>
+          <p:cNvPr name="Picture 2" id="2"/>
+          <p:cNvPicPr>
+            <a:picLocks noChangeAspect="true"/>
+          </p:cNvPicPr>
+          <p:nvPr/>
+        </p:nvPicPr>
+        <p:blipFill>
+          <a:blip r:embed="rId2"/>
+          <a:stretch>
+            <a:fillRect/>
+          </a:stretch>
+        </p:blipFill>
+        <p:spPr>
+          <a:xfrm>
+            <a:off x="0" y="0"/>
+            <a:ext cx="12192000" cy="6858000"/>
+          </a:xfrm>
+          <a:prstGeom prst="rect">
+            <a:avLst/>
+          </a:prstGeom>
+        </p:spPr>
+      </p:pic>
+      <p:sp>
+        <p:nvSpPr>
+          <p:cNvPr name="TextBox 3" id="3"/>
+          <p:cNvSpPr txBox="true"/>
+          <p:nvPr/>
+        </p:nvSpPr>
+        <p:spPr>
+          <a:xfrm>
+            <a:off x="4953000" y="-190500"/>
+            <a:ext cx="9525000" cy="762000"/>
+          </a:xfrm>
+          <a:prstGeom prst="rect">
+            <a:avLst/>
+          </a:prstGeom>
+        </p:spPr>
+        <p:txBody>
+          <a:bodyPr anchor="t" rtlCol="false"/>
+          <a:lstStyle/>
+          <a:p>
+            <a:pPr algn="l">
+              <a:defRPr/>
+            </a:pPr>
+            <a:r>
+              <a:rPr lang="fr-MG"/>
+              <a:t/>
+            </a:r>
+            <a:endParaRPr lang="en-US" sz="1100"/>
+          </a:p>
+          <a:p>
+            <a:pPr algn="l"/>
+            <a:r>
+              <a:rPr lang="en-US" sz="2900" b="true">
+                <a:solidFill>
+                  <a:srgbClr val="D1AC65"/>
+                </a:solidFill>
+                <a:latin typeface="Verdana"/>
+              </a:rPr>
+              <a:t>FIHIRANA 163 : 1, 3</a:t>
+            </a:r>
+          </a:p>
+        </p:txBody>
+      </p:sp>
+      <p:sp>
+        <p:nvSpPr>
+          <p:cNvPr name="TextBox 4" id="4"/>
+          <p:cNvSpPr txBox="true"/>
+          <p:nvPr/>
+        </p:nvSpPr>
+        <p:spPr>
+          <a:xfrm>
+            <a:off x="685800" y="508000"/>
+            <a:ext cx="10922000" cy="5080000"/>
+          </a:xfrm>
+          <a:prstGeom prst="rect">
+            <a:avLst/>
+          </a:prstGeom>
+        </p:spPr>
+        <p:txBody>
+          <a:bodyPr anchor="t" rtlCol="false"/>
+          <a:lstStyle/>
+          <a:p>
+            <a:pPr algn="l">
+              <a:defRPr/>
+            </a:pPr>
+            <a:r>
+              <a:rPr lang="fr-MG"/>
+              <a:t/>
+            </a:r>
+            <a:endParaRPr lang="en-US" sz="1100"/>
+          </a:p>
+          <a:p>
+            <a:pPr algn="ctr"/>
+            <a:r>
+              <a:rPr lang="en-US" sz="4500" b="true">
+                <a:solidFill>
+                  <a:srgbClr val="FFFFFF"/>
+                </a:solidFill>
+                <a:latin typeface="Verdana"/>
+              </a:rPr>
+              <a:t>Ry Jesosy, iresaho</a:t>
+            </a:r>
+          </a:p>
+          <a:p>
+            <a:pPr algn="ctr"/>
+            <a:r>
+              <a:rPr lang="en-US" sz="4500" b="true">
+                <a:solidFill>
+                  <a:srgbClr val="FFFFFF"/>
+                </a:solidFill>
+                <a:latin typeface="Verdana"/>
+              </a:rPr>
+              <a:t>Izahay mpianatrao,</a:t>
+            </a:r>
+          </a:p>
+          <a:p>
+            <a:pPr algn="ctr"/>
+            <a:r>
+              <a:rPr lang="en-US" sz="4500" b="true">
+                <a:solidFill>
+                  <a:srgbClr val="FFFFFF"/>
+                </a:solidFill>
+                <a:latin typeface="Verdana"/>
+              </a:rPr>
+              <a:t>Hafanao sy hatanjaho</a:t>
+            </a:r>
+          </a:p>
+          <a:p>
+            <a:pPr algn="ctr"/>
+            <a:r>
+              <a:rPr lang="en-US" sz="4500" b="true">
+                <a:solidFill>
+                  <a:srgbClr val="FFFFFF"/>
+                </a:solidFill>
+                <a:latin typeface="Verdana"/>
+              </a:rPr>
+              <a:t>Ny finoanay Anao.</a:t>
+            </a:r>
+          </a:p>
+          <a:p>
+            <a:pPr algn="ctr"/>
+            <a:r>
+              <a:rPr lang="en-US" sz="4500" b="true">
+                <a:solidFill>
+                  <a:srgbClr val="FFFFFF"/>
+                </a:solidFill>
+                <a:latin typeface="Verdana"/>
+              </a:rPr>
+              <a:t> </a:t>
+            </a:r>
+          </a:p>
+        </p:txBody>
+      </p:sp>
+    </p:spTree>
+  </p:cSld>
+  <p:clrMapOvr>
+    <a:masterClrMapping/>
+  </p:clrMapOvr>
+</p:sld>
+</file>
+
+<file path=ppt/slides/slide16.xml><?xml version="1.0" encoding="utf-8"?>
+<p:sld xmlns:p="http://schemas.openxmlformats.org/presentationml/2006/main" xmlns:a="http://schemas.openxmlformats.org/drawingml/2006/main" xmlns:r="http://schemas.openxmlformats.org/officeDocument/2006/relationships">
+  <p:cSld>
+    <p:spTree>
+      <p:nvGrpSpPr>
+        <p:cNvPr id="1" name=""/>
+        <p:cNvGrpSpPr/>
+        <p:nvPr/>
+      </p:nvGrpSpPr>
+      <p:grpSpPr>
+        <a:xfrm>
+          <a:off x="0" y="0"/>
+          <a:ext cx="0" cy="0"/>
+          <a:chOff x="0" y="0"/>
+          <a:chExt cx="0" cy="0"/>
+        </a:xfrm>
+      </p:grpSpPr>
+      <p:pic>
+        <p:nvPicPr>
+          <p:cNvPr name="Picture 2" id="2"/>
+          <p:cNvPicPr>
+            <a:picLocks noChangeAspect="true"/>
+          </p:cNvPicPr>
+          <p:nvPr/>
+        </p:nvPicPr>
+        <p:blipFill>
+          <a:blip r:embed="rId2"/>
+          <a:stretch>
+            <a:fillRect/>
+          </a:stretch>
+        </p:blipFill>
+        <p:spPr>
+          <a:xfrm>
+            <a:off x="0" y="0"/>
+            <a:ext cx="12192000" cy="6858000"/>
+          </a:xfrm>
+          <a:prstGeom prst="rect">
+            <a:avLst/>
+          </a:prstGeom>
+        </p:spPr>
+      </p:pic>
+      <p:sp>
+        <p:nvSpPr>
+          <p:cNvPr name="TextBox 3" id="3"/>
+          <p:cNvSpPr txBox="true"/>
+          <p:nvPr/>
+        </p:nvSpPr>
+        <p:spPr>
+          <a:xfrm>
+            <a:off x="4953000" y="-190500"/>
+            <a:ext cx="9525000" cy="762000"/>
+          </a:xfrm>
+          <a:prstGeom prst="rect">
+            <a:avLst/>
+          </a:prstGeom>
+        </p:spPr>
+        <p:txBody>
+          <a:bodyPr anchor="t" rtlCol="false"/>
+          <a:lstStyle/>
+          <a:p>
+            <a:pPr algn="l">
+              <a:defRPr/>
+            </a:pPr>
+            <a:r>
+              <a:rPr lang="fr-MG"/>
+              <a:t/>
+            </a:r>
+            <a:endParaRPr lang="en-US" sz="1100"/>
+          </a:p>
+          <a:p>
+            <a:pPr algn="l"/>
+            <a:r>
+              <a:rPr lang="en-US" sz="2900" b="true">
+                <a:solidFill>
+                  <a:srgbClr val="D1AC65"/>
+                </a:solidFill>
+                <a:latin typeface="Verdana"/>
+              </a:rPr>
+              <a:t>FIHIRANA 295 : 1</a:t>
+            </a:r>
+          </a:p>
+        </p:txBody>
+      </p:sp>
+      <p:sp>
+        <p:nvSpPr>
+          <p:cNvPr name="TextBox 4" id="4"/>
+          <p:cNvSpPr txBox="true"/>
+          <p:nvPr/>
+        </p:nvSpPr>
+        <p:spPr>
+          <a:xfrm>
+            <a:off x="685800" y="508000"/>
+            <a:ext cx="10922000" cy="5080000"/>
+          </a:xfrm>
+          <a:prstGeom prst="rect">
+            <a:avLst/>
+          </a:prstGeom>
+        </p:spPr>
+        <p:txBody>
+          <a:bodyPr anchor="t" rtlCol="false"/>
+          <a:lstStyle/>
+          <a:p>
+            <a:pPr algn="l">
+              <a:defRPr/>
+            </a:pPr>
+            <a:r>
+              <a:rPr lang="fr-MG"/>
+              <a:t/>
+            </a:r>
+            <a:endParaRPr lang="en-US" sz="1100"/>
+          </a:p>
+          <a:p>
+            <a:pPr algn="ctr"/>
+            <a:r>
+              <a:rPr lang="en-US" sz="4500" b="true">
+                <a:solidFill>
+                  <a:srgbClr val="D1AC65"/>
+                </a:solidFill>
+                <a:latin typeface="Verdana"/>
+              </a:rPr>
+              <a:t>1- </a:t>
+            </a:r>
+            <a:r>
+              <a:rPr lang="en-US" sz="4500" b="true">
+                <a:solidFill>
+                  <a:srgbClr val="FFFFFF"/>
+                </a:solidFill>
+                <a:latin typeface="Verdana"/>
+              </a:rPr>
+              <a:t>Miorena mafy tsara</a:t>
+            </a:r>
+          </a:p>
+          <a:p>
+            <a:pPr algn="ctr"/>
+            <a:r>
+              <a:rPr lang="en-US" sz="4500" b="true">
+                <a:solidFill>
+                  <a:srgbClr val="FFFFFF"/>
+                </a:solidFill>
+                <a:latin typeface="Verdana"/>
+              </a:rPr>
+              <a:t>Amin'Ilay vatosoa</a:t>
+            </a:r>
+          </a:p>
+          <a:p>
+            <a:pPr algn="ctr"/>
+            <a:r>
+              <a:rPr lang="en-US" sz="4500" b="true">
+                <a:solidFill>
+                  <a:srgbClr val="FFFFFF"/>
+                </a:solidFill>
+                <a:latin typeface="Verdana"/>
+              </a:rPr>
+              <a:t>Mandrosoa, mifahara,</a:t>
+            </a:r>
+          </a:p>
+          <a:p>
+            <a:pPr algn="ctr"/>
+            <a:r>
+              <a:rPr lang="en-US" sz="4500" b="true">
+                <a:solidFill>
+                  <a:srgbClr val="FFFFFF"/>
+                </a:solidFill>
+                <a:latin typeface="Verdana"/>
+              </a:rPr>
+              <a:t>Mifikira mafy koa.</a:t>
+            </a:r>
+          </a:p>
+        </p:txBody>
+      </p:sp>
+    </p:spTree>
+  </p:cSld>
+  <p:clrMapOvr>
+    <a:masterClrMapping/>
+  </p:clrMapOvr>
+</p:sld>
+</file>
+
+<file path=ppt/slides/slide17.xml><?xml version="1.0" encoding="utf-8"?>
+<p:sld xmlns:p="http://schemas.openxmlformats.org/presentationml/2006/main" xmlns:a="http://schemas.openxmlformats.org/drawingml/2006/main" xmlns:r="http://schemas.openxmlformats.org/officeDocument/2006/relationships">
+  <p:cSld>
+    <p:spTree>
+      <p:nvGrpSpPr>
+        <p:cNvPr id="1" name=""/>
+        <p:cNvGrpSpPr/>
+        <p:nvPr/>
+      </p:nvGrpSpPr>
+      <p:grpSpPr>
+        <a:xfrm>
+          <a:off x="0" y="0"/>
+          <a:ext cx="0" cy="0"/>
+          <a:chOff x="0" y="0"/>
+          <a:chExt cx="0" cy="0"/>
+        </a:xfrm>
+      </p:grpSpPr>
+      <p:pic>
+        <p:nvPicPr>
+          <p:cNvPr name="Picture 2" id="2"/>
+          <p:cNvPicPr>
+            <a:picLocks noChangeAspect="true"/>
+          </p:cNvPicPr>
+          <p:nvPr/>
+        </p:nvPicPr>
+        <p:blipFill>
+          <a:blip r:embed="rId2"/>
+          <a:stretch>
+            <a:fillRect/>
+          </a:stretch>
+        </p:blipFill>
+        <p:spPr>
+          <a:xfrm>
+            <a:off x="0" y="0"/>
+            <a:ext cx="12192000" cy="6858000"/>
+          </a:xfrm>
+          <a:prstGeom prst="rect">
+            <a:avLst/>
+          </a:prstGeom>
+        </p:spPr>
+      </p:pic>
+      <p:sp>
+        <p:nvSpPr>
+          <p:cNvPr name="TextBox 3" id="3"/>
+          <p:cNvSpPr txBox="true"/>
+          <p:nvPr/>
+        </p:nvSpPr>
+        <p:spPr>
+          <a:xfrm>
+            <a:off x="4953000" y="-190500"/>
+            <a:ext cx="9525000" cy="762000"/>
+          </a:xfrm>
+          <a:prstGeom prst="rect">
+            <a:avLst/>
+          </a:prstGeom>
+        </p:spPr>
+        <p:txBody>
+          <a:bodyPr anchor="t" rtlCol="false"/>
+          <a:lstStyle/>
+          <a:p>
+            <a:pPr algn="l">
+              <a:defRPr/>
+            </a:pPr>
+            <a:r>
+              <a:rPr lang="fr-MG"/>
+              <a:t/>
+            </a:r>
+            <a:endParaRPr lang="en-US" sz="1100"/>
+          </a:p>
+          <a:p>
+            <a:pPr algn="l"/>
+            <a:r>
+              <a:rPr lang="en-US" sz="2900" b="true">
+                <a:solidFill>
+                  <a:srgbClr val="D1AC65"/>
+                </a:solidFill>
+                <a:latin typeface="Verdana"/>
+              </a:rPr>
+              <a:t>FIHIRANA 295 : 1</a:t>
+            </a:r>
+          </a:p>
+        </p:txBody>
+      </p:sp>
+      <p:sp>
+        <p:nvSpPr>
+          <p:cNvPr name="TextBox 4" id="4"/>
+          <p:cNvSpPr txBox="true"/>
+          <p:nvPr/>
+        </p:nvSpPr>
+        <p:spPr>
+          <a:xfrm>
+            <a:off x="685800" y="508000"/>
+            <a:ext cx="10922000" cy="5080000"/>
+          </a:xfrm>
+          <a:prstGeom prst="rect">
+            <a:avLst/>
+          </a:prstGeom>
+        </p:spPr>
+        <p:txBody>
+          <a:bodyPr anchor="t" rtlCol="false"/>
+          <a:lstStyle/>
+          <a:p>
+            <a:pPr algn="l">
+              <a:defRPr/>
+            </a:pPr>
+            <a:r>
+              <a:rPr lang="fr-MG"/>
+              <a:t/>
+            </a:r>
+            <a:endParaRPr lang="en-US" sz="1100"/>
+          </a:p>
+          <a:p>
+            <a:pPr algn="ctr"/>
+            <a:r>
+              <a:rPr lang="en-US" sz="4500" b="true">
+                <a:solidFill>
+                  <a:srgbClr val="FFFFFF"/>
+                </a:solidFill>
+                <a:latin typeface="Verdana"/>
+              </a:rPr>
+              <a:t>He! Ny Tompo manambara</a:t>
+            </a:r>
+          </a:p>
+          <a:p>
+            <a:pPr algn="ctr"/>
+            <a:r>
+              <a:rPr lang="en-US" sz="4500" b="true">
+                <a:solidFill>
+                  <a:srgbClr val="FFFFFF"/>
+                </a:solidFill>
+                <a:latin typeface="Verdana"/>
+              </a:rPr>
+              <a:t>Fa ho sambatra tokoa,</a:t>
+            </a:r>
+          </a:p>
+          <a:p>
+            <a:pPr algn="ctr"/>
+            <a:r>
+              <a:rPr lang="en-US" sz="4500" b="true">
+                <a:solidFill>
+                  <a:srgbClr val="FFFFFF"/>
+                </a:solidFill>
+                <a:latin typeface="Verdana"/>
+              </a:rPr>
+              <a:t>Ka ho tsara miafara</a:t>
+            </a:r>
+          </a:p>
+          <a:p>
+            <a:pPr algn="ctr"/>
+            <a:r>
+              <a:rPr lang="en-US" sz="4500" b="true">
+                <a:solidFill>
+                  <a:srgbClr val="FFFFFF"/>
+                </a:solidFill>
+                <a:latin typeface="Verdana"/>
+              </a:rPr>
+              <a:t>Ny mpanompo mahasoa.</a:t>
+            </a:r>
+          </a:p>
+        </p:txBody>
+      </p:sp>
+    </p:spTree>
+  </p:cSld>
+  <p:clrMapOvr>
+    <a:masterClrMapping/>
+  </p:clrMapOvr>
+</p:sld>
+</file>
+
 <file path=ppt/slides/slide2.xml><?xml version="1.0" encoding="utf-8"?>
 <p:sld xmlns:p="http://schemas.openxmlformats.org/presentationml/2006/main" xmlns:a="http://schemas.openxmlformats.org/drawingml/2006/main" xmlns:r="http://schemas.openxmlformats.org/officeDocument/2006/relationships">
   <p:cSld>
